--- a/03_data_cleaning_preparation/data_analysis_data_prepration.pptx
+++ b/03_data_cleaning_preparation/data_analysis_data_prepration.pptx
@@ -13097,28 +13097,65 @@
       </p:sp>
       <p:sp>
         <p:nvSpPr>
-          <p:cNvPr id="7" name="TextBox 6">
+          <p:cNvPr id="10" name="Rectangle 4">
             <a:extLst>
               <a:ext uri="{FF2B5EF4-FFF2-40B4-BE49-F238E27FC236}">
-                <a16:creationId xmlns:a16="http://schemas.microsoft.com/office/drawing/2014/main" id="{E38CF232-D1AA-0D11-A6B0-A7ECB336A4D6}"/>
+                <a16:creationId xmlns:a16="http://schemas.microsoft.com/office/drawing/2014/main" id="{5AE69050-F57F-BDB2-AF22-746F775B0650}"/>
               </a:ext>
             </a:extLst>
           </p:cNvPr>
-          <p:cNvSpPr txBox="1"/>
+          <p:cNvSpPr>
+            <a:spLocks noChangeArrowheads="1"/>
+          </p:cNvSpPr>
           <p:nvPr/>
         </p:nvSpPr>
-        <p:spPr>
+        <p:spPr bwMode="auto">
           <a:xfrm>
-            <a:off x="4191000" y="1387971"/>
-            <a:ext cx="6654800" cy="4616648"/>
+            <a:off x="3804380" y="2033414"/>
+            <a:ext cx="7917720" cy="3616375"/>
           </a:xfrm>
           <a:prstGeom prst="rect">
             <a:avLst/>
           </a:prstGeom>
           <a:noFill/>
+          <a:ln>
+            <a:noFill/>
+          </a:ln>
+          <a:effectLst/>
+          <a:extLst>
+            <a:ext uri="{909E8E84-426E-40DD-AFC4-6F175D3DCCD1}">
+              <a14:hiddenFill xmlns:a14="http://schemas.microsoft.com/office/drawing/2010/main">
+                <a:solidFill>
+                  <a:schemeClr val="accent1"/>
+                </a:solidFill>
+              </a14:hiddenFill>
+            </a:ext>
+            <a:ext uri="{91240B29-F687-4F45-9708-019B960494DF}">
+              <a14:hiddenLine xmlns:a14="http://schemas.microsoft.com/office/drawing/2010/main" w="9525">
+                <a:solidFill>
+                  <a:schemeClr val="tx1"/>
+                </a:solidFill>
+                <a:miter lim="800000"/>
+                <a:headEnd/>
+                <a:tailEnd/>
+              </a14:hiddenLine>
+            </a:ext>
+            <a:ext uri="{AF507438-7753-43E0-B8FC-AC1667EBCBE1}">
+              <a14:hiddenEffects xmlns:a14="http://schemas.microsoft.com/office/drawing/2010/main">
+                <a:effectLst>
+                  <a:outerShdw dist="35921" dir="2700000" algn="ctr" rotWithShape="0">
+                    <a:schemeClr val="bg2"/>
+                  </a:outerShdw>
+                </a:effectLst>
+              </a14:hiddenEffects>
+            </a:ext>
+          </a:extLst>
         </p:spPr>
         <p:txBody>
-          <a:bodyPr wrap="square">
+          <a:bodyPr vert="horz" wrap="square" lIns="91440" tIns="0" rIns="91440" bIns="45720" numCol="1" anchor="ctr" anchorCtr="0" compatLnSpc="1">
+            <a:prstTxWarp prst="textNoShape">
+              <a:avLst/>
+            </a:prstTxWarp>
             <a:spAutoFit/>
           </a:bodyPr>
           <a:lstStyle/>
@@ -13140,7 +13177,7 @@
               <a:tabLst/>
             </a:pPr>
             <a:r>
-              <a:rPr kumimoji="0" lang="LID4096" altLang="LID4096" sz="2400" b="1" i="0" u="none" strike="noStrike" cap="none" normalizeH="0" baseline="0" dirty="0">
+              <a:rPr kumimoji="0" lang="LID4096" altLang="LID4096" sz="2000" b="1" i="0" u="none" strike="noStrike" cap="none" normalizeH="0" baseline="0" dirty="0">
                 <a:ln>
                   <a:noFill/>
                 </a:ln>
@@ -13150,9 +13187,9 @@
                 <a:effectLst/>
                 <a:latin typeface="Google Sans"/>
               </a:rPr>
-              <a:t>Datenbereinigung &amp; Standardisierung</a:t>
-            </a:r>
-            <a:endParaRPr kumimoji="0" lang="en-US" altLang="LID4096" sz="2400" b="1" i="0" u="none" strike="noStrike" cap="none" normalizeH="0" baseline="0" dirty="0">
+              <a:t>Transformation für Analyse &amp; Science</a:t>
+            </a:r>
+            <a:endParaRPr kumimoji="0" lang="en-US" altLang="LID4096" sz="2000" b="1" i="0" u="none" strike="noStrike" cap="none" normalizeH="0" baseline="0" dirty="0">
               <a:ln>
                 <a:noFill/>
               </a:ln>
@@ -13180,7 +13217,7 @@
               <a:buNone/>
               <a:tabLst/>
             </a:pPr>
-            <a:endParaRPr kumimoji="0" lang="LID4096" altLang="LID4096" b="1" i="0" u="none" strike="noStrike" cap="none" normalizeH="0" baseline="0" dirty="0">
+            <a:endParaRPr kumimoji="0" lang="LID4096" altLang="LID4096" sz="2000" b="1" i="0" u="none" strike="noStrike" cap="none" normalizeH="0" baseline="0" dirty="0">
               <a:ln>
                 <a:noFill/>
               </a:ln>
@@ -13209,7 +13246,7 @@
               <a:tabLst/>
             </a:pPr>
             <a:r>
-              <a:rPr kumimoji="0" lang="LID4096" altLang="LID4096" b="1" i="0" u="none" strike="noStrike" cap="none" normalizeH="0" baseline="0" dirty="0">
+              <a:rPr kumimoji="0" lang="LID4096" altLang="LID4096" sz="1600" b="1" i="0" u="none" strike="noStrike" cap="none" normalizeH="0" baseline="0" dirty="0">
                 <a:ln>
                   <a:noFill/>
                 </a:ln>
@@ -13222,7 +13259,7 @@
               <a:t>Ziel:</a:t>
             </a:r>
             <a:r>
-              <a:rPr kumimoji="0" lang="LID4096" altLang="LID4096" b="0" i="0" u="none" strike="noStrike" cap="none" normalizeH="0" baseline="0" dirty="0">
+              <a:rPr kumimoji="0" lang="LID4096" altLang="LID4096" sz="1600" b="0" i="0" u="none" strike="noStrike" cap="none" normalizeH="0" baseline="0" dirty="0">
                 <a:ln>
                   <a:noFill/>
                 </a:ln>
@@ -13232,9 +13269,49 @@
                 <a:effectLst/>
                 <a:latin typeface="Google Sans Text"/>
               </a:rPr>
-              <a:t> Fehler beheben und einen einheitlichen Datensatz erstellen.</a:t>
-            </a:r>
-            <a:endParaRPr kumimoji="0" lang="en-US" altLang="LID4096" b="0" i="0" u="none" strike="noStrike" cap="none" normalizeH="0" baseline="0" dirty="0">
+              <a:t> Variablen für menschliche Erkenntnisse oder maschinelle Verarbeitung vorbereiten.</a:t>
+            </a:r>
+            <a:endParaRPr kumimoji="0" lang="LID4096" altLang="LID4096" sz="1600" b="0" i="0" u="none" strike="noStrike" cap="none" normalizeH="0" baseline="0" dirty="0">
+              <a:ln>
+                <a:noFill/>
+              </a:ln>
+              <a:solidFill>
+                <a:schemeClr val="tx1"/>
+              </a:solidFill>
+              <a:effectLst/>
+            </a:endParaRPr>
+          </a:p>
+          <a:p>
+            <a:pPr marL="0" marR="0" lvl="0" indent="0" algn="l" defTabSz="914400" rtl="0" eaLnBrk="0" fontAlgn="base" latinLnBrk="0" hangingPunct="0">
+              <a:lnSpc>
+                <a:spcPct val="100000"/>
+              </a:lnSpc>
+              <a:spcBef>
+                <a:spcPct val="0"/>
+              </a:spcBef>
+              <a:spcAft>
+                <a:spcPct val="0"/>
+              </a:spcAft>
+              <a:buClrTx/>
+              <a:buSzTx/>
+              <a:buFontTx/>
+              <a:buChar char="•"/>
+              <a:tabLst/>
+            </a:pPr>
+            <a:r>
+              <a:rPr kumimoji="0" lang="LID4096" altLang="LID4096" sz="1600" b="1" i="0" u="none" strike="noStrike" cap="none" normalizeH="0" baseline="0" dirty="0">
+                <a:ln>
+                  <a:noFill/>
+                </a:ln>
+                <a:solidFill>
+                  <a:schemeClr val="tx1"/>
+                </a:solidFill>
+                <a:effectLst/>
+                <a:latin typeface="Google Sans Text"/>
+              </a:rPr>
+              <a:t>Scaling &amp; Normalisierung (Machine Ready):</a:t>
+            </a:r>
+            <a:endParaRPr kumimoji="0" lang="LID4096" altLang="LID4096" sz="1600" b="0" i="0" u="none" strike="noStrike" cap="none" normalizeH="0" baseline="0" dirty="0">
               <a:ln>
                 <a:noFill/>
               </a:ln>
@@ -13244,6 +13321,430 @@
               <a:effectLst/>
               <a:latin typeface="Google Sans Text"/>
             </a:endParaRPr>
+          </a:p>
+          <a:p>
+            <a:pPr marL="457200" marR="0" lvl="1" indent="0" algn="l" defTabSz="914400" rtl="0" eaLnBrk="0" fontAlgn="base" latinLnBrk="0" hangingPunct="0">
+              <a:lnSpc>
+                <a:spcPct val="100000"/>
+              </a:lnSpc>
+              <a:spcBef>
+                <a:spcPct val="0"/>
+              </a:spcBef>
+              <a:spcAft>
+                <a:spcPct val="0"/>
+              </a:spcAft>
+              <a:buClrTx/>
+              <a:buSzTx/>
+              <a:buFontTx/>
+              <a:buChar char="•"/>
+              <a:tabLst/>
+            </a:pPr>
+            <a:r>
+              <a:rPr kumimoji="0" lang="LID4096" altLang="LID4096" sz="1600" b="0" i="1" u="none" strike="noStrike" cap="none" normalizeH="0" baseline="0" dirty="0">
+                <a:ln>
+                  <a:noFill/>
+                </a:ln>
+                <a:solidFill>
+                  <a:schemeClr val="tx1"/>
+                </a:solidFill>
+                <a:effectLst/>
+                <a:latin typeface="Google Sans Text"/>
+              </a:rPr>
+              <a:t>Aktion:</a:t>
+            </a:r>
+            <a:r>
+              <a:rPr kumimoji="0" lang="LID4096" altLang="LID4096" sz="1600" b="0" i="0" u="none" strike="noStrike" cap="none" normalizeH="0" baseline="0" dirty="0">
+                <a:ln>
+                  <a:noFill/>
+                </a:ln>
+                <a:solidFill>
+                  <a:schemeClr val="tx1"/>
+                </a:solidFill>
+                <a:effectLst/>
+                <a:latin typeface="Google Sans Text"/>
+              </a:rPr>
+              <a:t> Zahlen auf einen gemeinsamen Bereich skalieren (z. B. $0$ bis $1$).</a:t>
+            </a:r>
+          </a:p>
+          <a:p>
+            <a:pPr marL="457200" marR="0" lvl="1" indent="0" algn="l" defTabSz="914400" rtl="0" eaLnBrk="0" fontAlgn="base" latinLnBrk="0" hangingPunct="0">
+              <a:lnSpc>
+                <a:spcPct val="100000"/>
+              </a:lnSpc>
+              <a:spcBef>
+                <a:spcPct val="0"/>
+              </a:spcBef>
+              <a:spcAft>
+                <a:spcPct val="0"/>
+              </a:spcAft>
+              <a:buClrTx/>
+              <a:buSzTx/>
+              <a:buFontTx/>
+              <a:buChar char="•"/>
+              <a:tabLst/>
+            </a:pPr>
+            <a:r>
+              <a:rPr kumimoji="0" lang="LID4096" altLang="LID4096" sz="1600" b="0" i="1" u="none" strike="noStrike" cap="none" normalizeH="0" baseline="0" dirty="0">
+                <a:ln>
+                  <a:noFill/>
+                </a:ln>
+                <a:solidFill>
+                  <a:schemeClr val="tx1"/>
+                </a:solidFill>
+                <a:effectLst/>
+                <a:latin typeface="Google Sans Text"/>
+              </a:rPr>
+              <a:t>Beispiel:</a:t>
+            </a:r>
+            <a:r>
+              <a:rPr kumimoji="0" lang="LID4096" altLang="LID4096" sz="1600" b="0" i="0" u="none" strike="noStrike" cap="none" normalizeH="0" baseline="0" dirty="0">
+                <a:ln>
+                  <a:noFill/>
+                </a:ln>
+                <a:solidFill>
+                  <a:schemeClr val="tx1"/>
+                </a:solidFill>
+                <a:effectLst/>
+                <a:latin typeface="Google Sans Text"/>
+              </a:rPr>
+              <a:t> Einen Preis von $200$ € und ein Volumen von $1.000.000$ auf derselben Skala vergleichbar machen.</a:t>
+            </a:r>
+          </a:p>
+          <a:p>
+            <a:pPr marL="0" marR="0" lvl="0" indent="0" algn="l" defTabSz="914400" rtl="0" eaLnBrk="0" fontAlgn="base" latinLnBrk="0" hangingPunct="0">
+              <a:lnSpc>
+                <a:spcPct val="100000"/>
+              </a:lnSpc>
+              <a:spcBef>
+                <a:spcPct val="0"/>
+              </a:spcBef>
+              <a:spcAft>
+                <a:spcPct val="0"/>
+              </a:spcAft>
+              <a:buClrTx/>
+              <a:buSzTx/>
+              <a:buFontTx/>
+              <a:buChar char="•"/>
+              <a:tabLst/>
+            </a:pPr>
+            <a:r>
+              <a:rPr kumimoji="0" lang="LID4096" altLang="LID4096" sz="1600" b="1" i="0" u="none" strike="noStrike" cap="none" normalizeH="0" baseline="0" dirty="0">
+                <a:ln>
+                  <a:noFill/>
+                </a:ln>
+                <a:solidFill>
+                  <a:schemeClr val="tx1"/>
+                </a:solidFill>
+                <a:effectLst/>
+                <a:latin typeface="Google Sans Text"/>
+              </a:rPr>
+              <a:t>Categorical Encoding:</a:t>
+            </a:r>
+            <a:endParaRPr kumimoji="0" lang="LID4096" altLang="LID4096" sz="1600" b="0" i="0" u="none" strike="noStrike" cap="none" normalizeH="0" baseline="0" dirty="0">
+              <a:ln>
+                <a:noFill/>
+              </a:ln>
+              <a:solidFill>
+                <a:schemeClr val="tx1"/>
+              </a:solidFill>
+              <a:effectLst/>
+              <a:latin typeface="Google Sans Text"/>
+            </a:endParaRPr>
+          </a:p>
+          <a:p>
+            <a:pPr marL="457200" marR="0" lvl="1" indent="0" algn="l" defTabSz="914400" rtl="0" eaLnBrk="0" fontAlgn="base" latinLnBrk="0" hangingPunct="0">
+              <a:lnSpc>
+                <a:spcPct val="100000"/>
+              </a:lnSpc>
+              <a:spcBef>
+                <a:spcPct val="0"/>
+              </a:spcBef>
+              <a:spcAft>
+                <a:spcPct val="0"/>
+              </a:spcAft>
+              <a:buClrTx/>
+              <a:buSzTx/>
+              <a:buFontTx/>
+              <a:buChar char="•"/>
+              <a:tabLst/>
+            </a:pPr>
+            <a:r>
+              <a:rPr kumimoji="0" lang="LID4096" altLang="LID4096" sz="1600" b="0" i="1" u="none" strike="noStrike" cap="none" normalizeH="0" baseline="0" dirty="0">
+                <a:ln>
+                  <a:noFill/>
+                </a:ln>
+                <a:solidFill>
+                  <a:schemeClr val="tx1"/>
+                </a:solidFill>
+                <a:effectLst/>
+                <a:latin typeface="Google Sans Text"/>
+              </a:rPr>
+              <a:t>Aktion:</a:t>
+            </a:r>
+            <a:r>
+              <a:rPr kumimoji="0" lang="LID4096" altLang="LID4096" sz="1600" b="0" i="0" u="none" strike="noStrike" cap="none" normalizeH="0" baseline="0" dirty="0">
+                <a:ln>
+                  <a:noFill/>
+                </a:ln>
+                <a:solidFill>
+                  <a:schemeClr val="tx1"/>
+                </a:solidFill>
+                <a:effectLst/>
+                <a:latin typeface="Google Sans Text"/>
+              </a:rPr>
+              <a:t> Text-Labels in numerische Werte umwandeln.</a:t>
+            </a:r>
+          </a:p>
+          <a:p>
+            <a:pPr marL="457200" marR="0" lvl="1" indent="0" algn="l" defTabSz="914400" rtl="0" eaLnBrk="0" fontAlgn="base" latinLnBrk="0" hangingPunct="0">
+              <a:lnSpc>
+                <a:spcPct val="100000"/>
+              </a:lnSpc>
+              <a:spcBef>
+                <a:spcPct val="0"/>
+              </a:spcBef>
+              <a:spcAft>
+                <a:spcPct val="0"/>
+              </a:spcAft>
+              <a:buClrTx/>
+              <a:buSzTx/>
+              <a:buFontTx/>
+              <a:buChar char="•"/>
+              <a:tabLst/>
+            </a:pPr>
+            <a:r>
+              <a:rPr kumimoji="0" lang="LID4096" altLang="LID4096" sz="1600" b="0" i="1" u="none" strike="noStrike" cap="none" normalizeH="0" baseline="0" dirty="0">
+                <a:ln>
+                  <a:noFill/>
+                </a:ln>
+                <a:solidFill>
+                  <a:schemeClr val="tx1"/>
+                </a:solidFill>
+                <a:effectLst/>
+                <a:latin typeface="Google Sans Text"/>
+              </a:rPr>
+              <a:t>Beispiel:</a:t>
+            </a:r>
+            <a:r>
+              <a:rPr kumimoji="0" lang="LID4096" altLang="LID4096" sz="1600" b="0" i="0" u="none" strike="noStrike" cap="none" normalizeH="0" baseline="0" dirty="0">
+                <a:ln>
+                  <a:noFill/>
+                </a:ln>
+                <a:solidFill>
+                  <a:schemeClr val="tx1"/>
+                </a:solidFill>
+                <a:effectLst/>
+                <a:latin typeface="Google Sans Text"/>
+              </a:rPr>
+              <a:t> "Kauf/Verkauf" in </a:t>
+            </a:r>
+            <a:r>
+              <a:rPr kumimoji="0" lang="LID4096" altLang="LID4096" sz="1600" b="1" i="0" u="none" strike="noStrike" cap="none" normalizeH="0" baseline="0" dirty="0">
+                <a:ln>
+                  <a:noFill/>
+                </a:ln>
+                <a:solidFill>
+                  <a:schemeClr val="tx1"/>
+                </a:solidFill>
+                <a:effectLst/>
+                <a:latin typeface="Google Sans Text"/>
+              </a:rPr>
+              <a:t>1/0</a:t>
+            </a:r>
+            <a:r>
+              <a:rPr kumimoji="0" lang="LID4096" altLang="LID4096" sz="1600" b="0" i="0" u="none" strike="noStrike" cap="none" normalizeH="0" baseline="0" dirty="0">
+                <a:ln>
+                  <a:noFill/>
+                </a:ln>
+                <a:solidFill>
+                  <a:schemeClr val="tx1"/>
+                </a:solidFill>
+                <a:effectLst/>
+                <a:latin typeface="Google Sans Text"/>
+              </a:rPr>
+              <a:t> ändern, damit ein Algorithmus damit rechnen kann.</a:t>
+            </a:r>
+          </a:p>
+          <a:p>
+            <a:pPr marL="0" marR="0" lvl="0" indent="0" algn="l" defTabSz="914400" rtl="0" eaLnBrk="0" fontAlgn="base" latinLnBrk="0" hangingPunct="0">
+              <a:lnSpc>
+                <a:spcPct val="100000"/>
+              </a:lnSpc>
+              <a:spcBef>
+                <a:spcPct val="0"/>
+              </a:spcBef>
+              <a:spcAft>
+                <a:spcPct val="0"/>
+              </a:spcAft>
+              <a:buClrTx/>
+              <a:buSzTx/>
+              <a:buFontTx/>
+              <a:buChar char="•"/>
+              <a:tabLst/>
+            </a:pPr>
+            <a:r>
+              <a:rPr kumimoji="0" lang="LID4096" altLang="LID4096" sz="1600" b="1" i="0" u="none" strike="noStrike" cap="none" normalizeH="0" baseline="0" dirty="0">
+                <a:ln>
+                  <a:noFill/>
+                </a:ln>
+                <a:solidFill>
+                  <a:schemeClr val="tx1"/>
+                </a:solidFill>
+                <a:effectLst/>
+                <a:latin typeface="Google Sans Text"/>
+              </a:rPr>
+              <a:t>Variable Binning (Gruppierung):</a:t>
+            </a:r>
+            <a:endParaRPr kumimoji="0" lang="LID4096" altLang="LID4096" sz="1600" b="0" i="0" u="none" strike="noStrike" cap="none" normalizeH="0" baseline="0" dirty="0">
+              <a:ln>
+                <a:noFill/>
+              </a:ln>
+              <a:solidFill>
+                <a:schemeClr val="tx1"/>
+              </a:solidFill>
+              <a:effectLst/>
+              <a:latin typeface="Google Sans Text"/>
+            </a:endParaRPr>
+          </a:p>
+          <a:p>
+            <a:pPr marL="457200" marR="0" lvl="1" indent="0" algn="l" defTabSz="914400" rtl="0" eaLnBrk="0" fontAlgn="base" latinLnBrk="0" hangingPunct="0">
+              <a:lnSpc>
+                <a:spcPct val="100000"/>
+              </a:lnSpc>
+              <a:spcBef>
+                <a:spcPct val="0"/>
+              </a:spcBef>
+              <a:spcAft>
+                <a:spcPct val="0"/>
+              </a:spcAft>
+              <a:buClrTx/>
+              <a:buSzTx/>
+              <a:buFontTx/>
+              <a:buChar char="•"/>
+              <a:tabLst/>
+            </a:pPr>
+            <a:r>
+              <a:rPr kumimoji="0" lang="LID4096" altLang="LID4096" sz="1600" b="0" i="1" u="none" strike="noStrike" cap="none" normalizeH="0" baseline="0" dirty="0">
+                <a:ln>
+                  <a:noFill/>
+                </a:ln>
+                <a:solidFill>
+                  <a:schemeClr val="tx1"/>
+                </a:solidFill>
+                <a:effectLst/>
+                <a:latin typeface="Google Sans Text"/>
+              </a:rPr>
+              <a:t>Aktion:</a:t>
+            </a:r>
+            <a:r>
+              <a:rPr kumimoji="0" lang="LID4096" altLang="LID4096" sz="1600" b="0" i="0" u="none" strike="noStrike" cap="none" normalizeH="0" baseline="0" dirty="0">
+                <a:ln>
+                  <a:noFill/>
+                </a:ln>
+                <a:solidFill>
+                  <a:schemeClr val="tx1"/>
+                </a:solidFill>
+                <a:effectLst/>
+                <a:latin typeface="Google Sans Text"/>
+              </a:rPr>
+              <a:t> Kontinuierliche Daten in diskrete „Eimer“ (Buckets) einteilen.</a:t>
+            </a:r>
+          </a:p>
+          <a:p>
+            <a:pPr marL="457200" marR="0" lvl="1" indent="0" algn="l" defTabSz="914400" rtl="0" eaLnBrk="0" fontAlgn="base" latinLnBrk="0" hangingPunct="0">
+              <a:lnSpc>
+                <a:spcPct val="100000"/>
+              </a:lnSpc>
+              <a:spcBef>
+                <a:spcPct val="0"/>
+              </a:spcBef>
+              <a:spcAft>
+                <a:spcPct val="0"/>
+              </a:spcAft>
+              <a:buClrTx/>
+              <a:buSzTx/>
+              <a:buFontTx/>
+              <a:buChar char="•"/>
+              <a:tabLst/>
+            </a:pPr>
+            <a:r>
+              <a:rPr kumimoji="0" lang="LID4096" altLang="LID4096" sz="1600" b="0" i="1" u="none" strike="noStrike" cap="none" normalizeH="0" baseline="0" dirty="0">
+                <a:ln>
+                  <a:noFill/>
+                </a:ln>
+                <a:solidFill>
+                  <a:schemeClr val="tx1"/>
+                </a:solidFill>
+                <a:effectLst/>
+                <a:latin typeface="Google Sans Text"/>
+              </a:rPr>
+              <a:t>Beispiel:</a:t>
+            </a:r>
+            <a:r>
+              <a:rPr kumimoji="0" lang="LID4096" altLang="LID4096" sz="1600" b="0" i="0" u="none" strike="noStrike" cap="none" normalizeH="0" baseline="0" dirty="0">
+                <a:ln>
+                  <a:noFill/>
+                </a:ln>
+                <a:solidFill>
+                  <a:schemeClr val="tx1"/>
+                </a:solidFill>
+                <a:effectLst/>
+                <a:latin typeface="Google Sans Text"/>
+              </a:rPr>
+              <a:t> Alterswerte in Gruppen wie </a:t>
+            </a:r>
+            <a:r>
+              <a:rPr kumimoji="0" lang="LID4096" altLang="LID4096" sz="1600" b="1" i="0" u="none" strike="noStrike" cap="none" normalizeH="0" baseline="0" dirty="0">
+                <a:ln>
+                  <a:noFill/>
+                </a:ln>
+                <a:solidFill>
+                  <a:schemeClr val="tx1"/>
+                </a:solidFill>
+                <a:effectLst/>
+                <a:latin typeface="Google Sans Text"/>
+              </a:rPr>
+              <a:t>"Junior"</a:t>
+            </a:r>
+            <a:r>
+              <a:rPr kumimoji="0" lang="LID4096" altLang="LID4096" sz="1600" b="0" i="0" u="none" strike="noStrike" cap="none" normalizeH="0" baseline="0" dirty="0">
+                <a:ln>
+                  <a:noFill/>
+                </a:ln>
+                <a:solidFill>
+                  <a:schemeClr val="tx1"/>
+                </a:solidFill>
+                <a:effectLst/>
+                <a:latin typeface="Google Sans Text"/>
+              </a:rPr>
+              <a:t> oder </a:t>
+            </a:r>
+            <a:r>
+              <a:rPr kumimoji="0" lang="LID4096" altLang="LID4096" sz="1600" b="1" i="0" u="none" strike="noStrike" cap="none" normalizeH="0" baseline="0" dirty="0">
+                <a:ln>
+                  <a:noFill/>
+                </a:ln>
+                <a:solidFill>
+                  <a:schemeClr val="tx1"/>
+                </a:solidFill>
+                <a:effectLst/>
+                <a:latin typeface="Google Sans Text"/>
+              </a:rPr>
+              <a:t>"Senior"</a:t>
+            </a:r>
+            <a:r>
+              <a:rPr kumimoji="0" lang="LID4096" altLang="LID4096" sz="1600" b="0" i="0" u="none" strike="noStrike" cap="none" normalizeH="0" baseline="0" dirty="0">
+                <a:ln>
+                  <a:noFill/>
+                </a:ln>
+                <a:solidFill>
+                  <a:schemeClr val="tx1"/>
+                </a:solidFill>
+                <a:effectLst/>
+                <a:latin typeface="Google Sans Text"/>
+              </a:rPr>
+              <a:t> umwandeln.</a:t>
+            </a:r>
           </a:p>
           <a:p>
             <a:pPr marL="0" marR="0" lvl="0" indent="0" algn="l" defTabSz="914400" rtl="0" eaLnBrk="0" fontAlgn="base" latinLnBrk="0" hangingPunct="0">
@@ -13262,443 +13763,7 @@
               <a:buNone/>
               <a:tabLst/>
             </a:pPr>
-            <a:endParaRPr kumimoji="0" lang="LID4096" altLang="LID4096" b="0" i="0" u="none" strike="noStrike" cap="none" normalizeH="0" baseline="0" dirty="0">
-              <a:ln>
-                <a:noFill/>
-              </a:ln>
-              <a:solidFill>
-                <a:schemeClr val="tx1"/>
-              </a:solidFill>
-              <a:effectLst/>
-            </a:endParaRPr>
-          </a:p>
-          <a:p>
-            <a:pPr marL="0" marR="0" lvl="0" indent="0" algn="l" defTabSz="914400" rtl="0" eaLnBrk="0" fontAlgn="base" latinLnBrk="0" hangingPunct="0">
-              <a:lnSpc>
-                <a:spcPct val="100000"/>
-              </a:lnSpc>
-              <a:spcBef>
-                <a:spcPct val="0"/>
-              </a:spcBef>
-              <a:spcAft>
-                <a:spcPct val="0"/>
-              </a:spcAft>
-              <a:buClrTx/>
-              <a:buSzTx/>
-              <a:buFontTx/>
-              <a:buChar char="•"/>
-              <a:tabLst/>
-            </a:pPr>
-            <a:r>
-              <a:rPr kumimoji="0" lang="LID4096" altLang="LID4096" b="1" i="0" u="none" strike="noStrike" cap="none" normalizeH="0" baseline="0" dirty="0">
-                <a:ln>
-                  <a:noFill/>
-                </a:ln>
-                <a:solidFill>
-                  <a:schemeClr val="tx1"/>
-                </a:solidFill>
-                <a:effectLst/>
-                <a:latin typeface="Google Sans Text"/>
-              </a:rPr>
-              <a:t>Fehlerhafte Werte korrigieren</a:t>
-            </a:r>
-            <a:endParaRPr kumimoji="0" lang="LID4096" altLang="LID4096" b="0" i="0" u="none" strike="noStrike" cap="none" normalizeH="0" baseline="0" dirty="0">
-              <a:ln>
-                <a:noFill/>
-              </a:ln>
-              <a:solidFill>
-                <a:schemeClr val="tx1"/>
-              </a:solidFill>
-              <a:effectLst/>
-              <a:latin typeface="Google Sans Text"/>
-            </a:endParaRPr>
-          </a:p>
-          <a:p>
-            <a:pPr marL="457200" marR="0" lvl="1" indent="0" algn="l" defTabSz="914400" rtl="0" eaLnBrk="0" fontAlgn="base" latinLnBrk="0" hangingPunct="0">
-              <a:lnSpc>
-                <a:spcPct val="100000"/>
-              </a:lnSpc>
-              <a:spcBef>
-                <a:spcPct val="0"/>
-              </a:spcBef>
-              <a:spcAft>
-                <a:spcPct val="0"/>
-              </a:spcAft>
-              <a:buClrTx/>
-              <a:buSzTx/>
-              <a:buFontTx/>
-              <a:buChar char="•"/>
-              <a:tabLst/>
-            </a:pPr>
-            <a:r>
-              <a:rPr kumimoji="0" lang="LID4096" altLang="LID4096" b="0" i="1" u="none" strike="noStrike" cap="none" normalizeH="0" baseline="0" dirty="0">
-                <a:ln>
-                  <a:noFill/>
-                </a:ln>
-                <a:solidFill>
-                  <a:schemeClr val="tx1"/>
-                </a:solidFill>
-                <a:effectLst/>
-                <a:latin typeface="Google Sans Text"/>
-              </a:rPr>
-              <a:t>Beispiel:</a:t>
-            </a:r>
-            <a:r>
-              <a:rPr kumimoji="0" lang="LID4096" altLang="LID4096" b="0" i="0" u="none" strike="noStrike" cap="none" normalizeH="0" baseline="0" dirty="0">
-                <a:ln>
-                  <a:noFill/>
-                </a:ln>
-                <a:solidFill>
-                  <a:schemeClr val="tx1"/>
-                </a:solidFill>
-                <a:effectLst/>
-                <a:latin typeface="Google Sans Text"/>
-              </a:rPr>
-              <a:t> „N/A“ oder fehlende Werte durch den Durchschnitt (z. B. $25$) ersetzen oder Zeilen löschen (</a:t>
-            </a:r>
-            <a:r>
-              <a:rPr kumimoji="0" lang="LID4096" altLang="LID4096" b="1" i="0" u="none" strike="noStrike" cap="none" normalizeH="0" baseline="0" dirty="0">
-                <a:ln>
-                  <a:noFill/>
-                </a:ln>
-                <a:solidFill>
-                  <a:schemeClr val="tx1"/>
-                </a:solidFill>
-                <a:effectLst/>
-                <a:latin typeface="Google Sans Text"/>
-              </a:rPr>
-              <a:t>Data Cleaning</a:t>
-            </a:r>
-            <a:r>
-              <a:rPr kumimoji="0" lang="LID4096" altLang="LID4096" b="0" i="0" u="none" strike="noStrike" cap="none" normalizeH="0" baseline="0" dirty="0">
-                <a:ln>
-                  <a:noFill/>
-                </a:ln>
-                <a:solidFill>
-                  <a:schemeClr val="tx1"/>
-                </a:solidFill>
-                <a:effectLst/>
-                <a:latin typeface="Google Sans Text"/>
-              </a:rPr>
-              <a:t>).</a:t>
-            </a:r>
-            <a:endParaRPr kumimoji="0" lang="en-US" altLang="LID4096" b="0" i="0" u="none" strike="noStrike" cap="none" normalizeH="0" baseline="0" dirty="0">
-              <a:ln>
-                <a:noFill/>
-              </a:ln>
-              <a:solidFill>
-                <a:schemeClr val="tx1"/>
-              </a:solidFill>
-              <a:effectLst/>
-              <a:latin typeface="Google Sans Text"/>
-            </a:endParaRPr>
-          </a:p>
-          <a:p>
-            <a:pPr marL="457200" marR="0" lvl="1" indent="0" algn="l" defTabSz="914400" rtl="0" eaLnBrk="0" fontAlgn="base" latinLnBrk="0" hangingPunct="0">
-              <a:lnSpc>
-                <a:spcPct val="100000"/>
-              </a:lnSpc>
-              <a:spcBef>
-                <a:spcPct val="0"/>
-              </a:spcBef>
-              <a:spcAft>
-                <a:spcPct val="0"/>
-              </a:spcAft>
-              <a:buClrTx/>
-              <a:buSzTx/>
-              <a:buFontTx/>
-              <a:buChar char="•"/>
-              <a:tabLst/>
-            </a:pPr>
-            <a:endParaRPr kumimoji="0" lang="LID4096" altLang="LID4096" b="0" i="0" u="none" strike="noStrike" cap="none" normalizeH="0" baseline="0" dirty="0">
-              <a:ln>
-                <a:noFill/>
-              </a:ln>
-              <a:solidFill>
-                <a:schemeClr val="tx1"/>
-              </a:solidFill>
-              <a:effectLst/>
-              <a:latin typeface="Google Sans Text"/>
-            </a:endParaRPr>
-          </a:p>
-          <a:p>
-            <a:pPr marL="0" marR="0" lvl="0" indent="0" algn="l" defTabSz="914400" rtl="0" eaLnBrk="0" fontAlgn="base" latinLnBrk="0" hangingPunct="0">
-              <a:lnSpc>
-                <a:spcPct val="100000"/>
-              </a:lnSpc>
-              <a:spcBef>
-                <a:spcPct val="0"/>
-              </a:spcBef>
-              <a:spcAft>
-                <a:spcPct val="0"/>
-              </a:spcAft>
-              <a:buClrTx/>
-              <a:buSzTx/>
-              <a:buFontTx/>
-              <a:buChar char="•"/>
-              <a:tabLst/>
-            </a:pPr>
-            <a:r>
-              <a:rPr kumimoji="0" lang="LID4096" altLang="LID4096" b="1" i="0" u="none" strike="noStrike" cap="none" normalizeH="0" baseline="0" dirty="0">
-                <a:ln>
-                  <a:noFill/>
-                </a:ln>
-                <a:solidFill>
-                  <a:schemeClr val="tx1"/>
-                </a:solidFill>
-                <a:effectLst/>
-                <a:latin typeface="Google Sans Text"/>
-              </a:rPr>
-              <a:t>Formate standardisieren</a:t>
-            </a:r>
-            <a:endParaRPr kumimoji="0" lang="LID4096" altLang="LID4096" b="0" i="0" u="none" strike="noStrike" cap="none" normalizeH="0" baseline="0" dirty="0">
-              <a:ln>
-                <a:noFill/>
-              </a:ln>
-              <a:solidFill>
-                <a:schemeClr val="tx1"/>
-              </a:solidFill>
-              <a:effectLst/>
-              <a:latin typeface="Google Sans Text"/>
-            </a:endParaRPr>
-          </a:p>
-          <a:p>
-            <a:pPr marL="457200" marR="0" lvl="1" indent="0" algn="l" defTabSz="914400" rtl="0" eaLnBrk="0" fontAlgn="base" latinLnBrk="0" hangingPunct="0">
-              <a:lnSpc>
-                <a:spcPct val="100000"/>
-              </a:lnSpc>
-              <a:spcBef>
-                <a:spcPct val="0"/>
-              </a:spcBef>
-              <a:spcAft>
-                <a:spcPct val="0"/>
-              </a:spcAft>
-              <a:buClrTx/>
-              <a:buSzTx/>
-              <a:buFontTx/>
-              <a:buChar char="•"/>
-              <a:tabLst/>
-            </a:pPr>
-            <a:r>
-              <a:rPr kumimoji="0" lang="LID4096" altLang="LID4096" b="0" i="1" u="none" strike="noStrike" cap="none" normalizeH="0" baseline="0" dirty="0">
-                <a:ln>
-                  <a:noFill/>
-                </a:ln>
-                <a:solidFill>
-                  <a:schemeClr val="tx1"/>
-                </a:solidFill>
-                <a:effectLst/>
-                <a:latin typeface="Google Sans Text"/>
-              </a:rPr>
-              <a:t>Beispiel:</a:t>
-            </a:r>
-            <a:r>
-              <a:rPr kumimoji="0" lang="LID4096" altLang="LID4096" b="0" i="0" u="none" strike="noStrike" cap="none" normalizeH="0" baseline="0" dirty="0">
-                <a:ln>
-                  <a:noFill/>
-                </a:ln>
-                <a:solidFill>
-                  <a:schemeClr val="tx1"/>
-                </a:solidFill>
-                <a:effectLst/>
-                <a:latin typeface="Google Sans Text"/>
-              </a:rPr>
-              <a:t> Unterschiedliche Daten wie „1. Jan“, „01/01/26“ einheitlich zu </a:t>
-            </a:r>
-            <a:r>
-              <a:rPr kumimoji="0" lang="LID4096" altLang="LID4096" b="1" i="0" u="none" strike="noStrike" cap="none" normalizeH="0" baseline="0" dirty="0">
-                <a:ln>
-                  <a:noFill/>
-                </a:ln>
-                <a:solidFill>
-                  <a:schemeClr val="tx1"/>
-                </a:solidFill>
-                <a:effectLst/>
-                <a:latin typeface="Google Sans Text"/>
-              </a:rPr>
-              <a:t>2026-01-01</a:t>
-            </a:r>
-            <a:r>
-              <a:rPr kumimoji="0" lang="LID4096" altLang="LID4096" b="0" i="0" u="none" strike="noStrike" cap="none" normalizeH="0" baseline="0" dirty="0">
-                <a:ln>
-                  <a:noFill/>
-                </a:ln>
-                <a:solidFill>
-                  <a:schemeClr val="tx1"/>
-                </a:solidFill>
-                <a:effectLst/>
-                <a:latin typeface="Google Sans Text"/>
-              </a:rPr>
-              <a:t> umwandeln.</a:t>
-            </a:r>
-            <a:endParaRPr kumimoji="0" lang="en-US" altLang="LID4096" b="0" i="0" u="none" strike="noStrike" cap="none" normalizeH="0" baseline="0" dirty="0">
-              <a:ln>
-                <a:noFill/>
-              </a:ln>
-              <a:solidFill>
-                <a:schemeClr val="tx1"/>
-              </a:solidFill>
-              <a:effectLst/>
-              <a:latin typeface="Google Sans Text"/>
-            </a:endParaRPr>
-          </a:p>
-          <a:p>
-            <a:pPr marL="457200" marR="0" lvl="1" indent="0" algn="l" defTabSz="914400" rtl="0" eaLnBrk="0" fontAlgn="base" latinLnBrk="0" hangingPunct="0">
-              <a:lnSpc>
-                <a:spcPct val="100000"/>
-              </a:lnSpc>
-              <a:spcBef>
-                <a:spcPct val="0"/>
-              </a:spcBef>
-              <a:spcAft>
-                <a:spcPct val="0"/>
-              </a:spcAft>
-              <a:buClrTx/>
-              <a:buSzTx/>
-              <a:buFontTx/>
-              <a:buChar char="•"/>
-              <a:tabLst/>
-            </a:pPr>
-            <a:endParaRPr kumimoji="0" lang="LID4096" altLang="LID4096" b="0" i="0" u="none" strike="noStrike" cap="none" normalizeH="0" baseline="0" dirty="0">
-              <a:ln>
-                <a:noFill/>
-              </a:ln>
-              <a:solidFill>
-                <a:schemeClr val="tx1"/>
-              </a:solidFill>
-              <a:effectLst/>
-              <a:latin typeface="Google Sans Text"/>
-            </a:endParaRPr>
-          </a:p>
-          <a:p>
-            <a:pPr marL="0" marR="0" lvl="0" indent="0" algn="l" defTabSz="914400" rtl="0" eaLnBrk="0" fontAlgn="base" latinLnBrk="0" hangingPunct="0">
-              <a:lnSpc>
-                <a:spcPct val="100000"/>
-              </a:lnSpc>
-              <a:spcBef>
-                <a:spcPct val="0"/>
-              </a:spcBef>
-              <a:spcAft>
-                <a:spcPct val="0"/>
-              </a:spcAft>
-              <a:buClrTx/>
-              <a:buSzTx/>
-              <a:buFontTx/>
-              <a:buChar char="•"/>
-              <a:tabLst/>
-            </a:pPr>
-            <a:r>
-              <a:rPr kumimoji="0" lang="LID4096" altLang="LID4096" b="1" i="0" u="none" strike="noStrike" cap="none" normalizeH="0" baseline="0" dirty="0">
-                <a:ln>
-                  <a:noFill/>
-                </a:ln>
-                <a:solidFill>
-                  <a:schemeClr val="tx1"/>
-                </a:solidFill>
-                <a:effectLst/>
-                <a:latin typeface="Google Sans Text"/>
-              </a:rPr>
-              <a:t>Kategorien vereinheitlichen</a:t>
-            </a:r>
-            <a:endParaRPr kumimoji="0" lang="LID4096" altLang="LID4096" b="0" i="0" u="none" strike="noStrike" cap="none" normalizeH="0" baseline="0" dirty="0">
-              <a:ln>
-                <a:noFill/>
-              </a:ln>
-              <a:solidFill>
-                <a:schemeClr val="tx1"/>
-              </a:solidFill>
-              <a:effectLst/>
-              <a:latin typeface="Google Sans Text"/>
-            </a:endParaRPr>
-          </a:p>
-          <a:p>
-            <a:pPr marL="457200" marR="0" lvl="1" indent="0" algn="l" defTabSz="914400" rtl="0" eaLnBrk="0" fontAlgn="base" latinLnBrk="0" hangingPunct="0">
-              <a:lnSpc>
-                <a:spcPct val="100000"/>
-              </a:lnSpc>
-              <a:spcBef>
-                <a:spcPct val="0"/>
-              </a:spcBef>
-              <a:spcAft>
-                <a:spcPct val="0"/>
-              </a:spcAft>
-              <a:buClrTx/>
-              <a:buSzTx/>
-              <a:buFontTx/>
-              <a:buChar char="•"/>
-              <a:tabLst/>
-            </a:pPr>
-            <a:r>
-              <a:rPr kumimoji="0" lang="LID4096" altLang="LID4096" b="0" i="1" u="none" strike="noStrike" cap="none" normalizeH="0" baseline="0" dirty="0">
-                <a:ln>
-                  <a:noFill/>
-                </a:ln>
-                <a:solidFill>
-                  <a:schemeClr val="tx1"/>
-                </a:solidFill>
-                <a:effectLst/>
-                <a:latin typeface="Google Sans Text"/>
-              </a:rPr>
-              <a:t>Beispiel:</a:t>
-            </a:r>
-            <a:r>
-              <a:rPr kumimoji="0" lang="LID4096" altLang="LID4096" b="0" i="0" u="none" strike="noStrike" cap="none" normalizeH="0" baseline="0" dirty="0">
-                <a:ln>
-                  <a:noFill/>
-                </a:ln>
-                <a:solidFill>
-                  <a:schemeClr val="tx1"/>
-                </a:solidFill>
-                <a:effectLst/>
-                <a:latin typeface="Google Sans Text"/>
-              </a:rPr>
-              <a:t> „DE“, „germany“ und „Deutschland“ zu einem Label zusammenfassen: </a:t>
-            </a:r>
-            <a:r>
-              <a:rPr kumimoji="0" lang="LID4096" altLang="LID4096" b="1" i="0" u="none" strike="noStrike" cap="none" normalizeH="0" baseline="0" dirty="0">
-                <a:ln>
-                  <a:noFill/>
-                </a:ln>
-                <a:solidFill>
-                  <a:schemeClr val="tx1"/>
-                </a:solidFill>
-                <a:effectLst/>
-                <a:latin typeface="Google Sans Text"/>
-              </a:rPr>
-              <a:t>Germany</a:t>
-            </a:r>
-            <a:r>
-              <a:rPr kumimoji="0" lang="LID4096" altLang="LID4096" b="0" i="0" u="none" strike="noStrike" cap="none" normalizeH="0" baseline="0" dirty="0">
-                <a:ln>
-                  <a:noFill/>
-                </a:ln>
-                <a:solidFill>
-                  <a:schemeClr val="tx1"/>
-                </a:solidFill>
-                <a:effectLst/>
-                <a:latin typeface="Google Sans Text"/>
-              </a:rPr>
-              <a:t>.</a:t>
-            </a:r>
-          </a:p>
-          <a:p>
-            <a:pPr marL="0" marR="0" lvl="0" indent="0" algn="l" defTabSz="914400" rtl="0" eaLnBrk="0" fontAlgn="base" latinLnBrk="0" hangingPunct="0">
-              <a:lnSpc>
-                <a:spcPct val="100000"/>
-              </a:lnSpc>
-              <a:spcBef>
-                <a:spcPct val="0"/>
-              </a:spcBef>
-              <a:spcAft>
-                <a:spcPct val="0"/>
-              </a:spcAft>
-              <a:buClrTx/>
-              <a:buSzTx/>
-              <a:buFontTx/>
-              <a:buNone/>
-              <a:tabLst/>
-            </a:pPr>
-            <a:endParaRPr kumimoji="0" lang="LID4096" altLang="LID4096" b="0" i="0" u="none" strike="noStrike" cap="none" normalizeH="0" baseline="0" dirty="0">
+            <a:endParaRPr kumimoji="0" lang="LID4096" altLang="LID4096" sz="1600" b="0" i="0" u="none" strike="noStrike" cap="none" normalizeH="0" baseline="0" dirty="0">
               <a:ln>
                 <a:noFill/>
               </a:ln>
